--- a/Mid_Project_Review_FINAL.pptx
+++ b/Mid_Project_Review_FINAL.pptx
@@ -6917,7 +6917,7 @@
                 <a:ea typeface="Calibri" pitchFamily="34" charset="-122"/>
                 <a:cs typeface="Calibri" pitchFamily="34" charset="-120"/>
               </a:rPr>
-              <a:t>Customer churn is costly for telecom companies</a:t>
+              <a:t>Customer churn is costly for telecom/Ecommerce companies</a:t>
             </a:r>
             <a:endParaRPr lang="en-US" sz="1400" dirty="0"/>
           </a:p>
